--- a/dist/초3/과학/건강과탐구/초3_과학_건강과탐구_02_감염병예방.pptx
+++ b/dist/초3/과학/건강과탐구/초3_과학_건강과탐구_02_감염병예방.pptx
@@ -123,13 +123,13 @@
   <p:extLst>
     <p:ext uri="{521415D9-36F7-43E2-AB2F-B90AF26B5E84}">
       <p14:sectionLst xmlns:p14="http://schemas.microsoft.com/office/powerpoint/2010/main">
-        <p14:section name="도입" id="{3dc5afce-b2d0-2f30-1ffd-e3749ba00f75}">
+        <p14:section name="도입" id="{93487651-eec5-7def-fd6f-e5e298c627e5}">
           <p14:sldIdLst>
             <p14:sldId id="256"/>
             <p14:sldId id="257"/>
           </p14:sldIdLst>
         </p14:section>
-        <p14:section name="개념" id="{7804bfd9-8ba4-c1ff-ba82-e1e3a8b1fad9}">
+        <p14:section name="개념" id="{d54f5d92-29a3-7a9e-5cc1-4cdd956c564b}">
           <p14:sldIdLst>
             <p14:sldId id="258"/>
             <p14:sldId id="263"/>
@@ -138,7 +138,7 @@
             <p14:sldId id="266"/>
           </p14:sldIdLst>
         </p14:section>
-        <p14:section name="연습" id="{a9ba0cd0-879b-75da-3a40-3498296748ef}">
+        <p14:section name="연습" id="{c8e6fef1-5504-6bef-5877-e42757a96bf6}">
           <p14:sldIdLst>
             <p14:sldId id="259"/>
             <p14:sldId id="260"/>
@@ -147,25 +147,25 @@
             <p14:sldId id="267"/>
           </p14:sldIdLst>
         </p14:section>
-        <p14:section name="개념" id="{1cc2ff9c-9c90-c7a6-83c2-f7e872ab9ce0}">
+        <p14:section name="개념" id="{60170b78-0c11-b8ae-84d5-bb51088843b7}">
           <p14:sldIdLst/>
         </p14:section>
-        <p14:section name="연습" id="{bdc6c6aa-0b68-a4de-c687-aff2e30d83d7}">
+        <p14:section name="연습" id="{1fb765b6-fe25-cd32-6d90-fd423dd662d9}">
           <p14:sldIdLst/>
         </p14:section>
-        <p14:section name="확인" id="{a572eb58-b5ee-ed83-2f9d-dc8a10bc51c9}">
+        <p14:section name="확인" id="{c72560b2-6db7-5909-1ac5-55aa3e9f3d00}">
           <p14:sldIdLst>
             <p14:sldId id="268"/>
             <p14:sldId id="269"/>
             <p14:sldId id="270"/>
           </p14:sldIdLst>
         </p14:section>
-        <p14:section name="정리" id="{64bfb4dc-64dd-c68f-4f04-5f1e9c34cd07}">
+        <p14:section name="정리" id="{3b98e1f0-efb9-ff92-746a-78d7de934c65}">
           <p14:sldIdLst>
             <p14:sldId id="271"/>
           </p14:sldIdLst>
         </p14:section>
-        <p14:section name="보충" id="{76c8f4c9-4727-1984-fc29-d11053c89e81}">
+        <p14:section name="보충" id="{de541def-6ac4-be7a-22d6-551b7ecb9fd1}">
           <p14:sldIdLst>
             <p14:sldId id="272"/>
           </p14:sldIdLst>
